--- a/06_docs/Drill_Tower_Project_Steering_Presentation.pptx
+++ b/06_docs/Drill_Tower_Project_Steering_Presentation.pptx
@@ -3271,7 +3271,7 @@
         </p:nvGraphicFramePr>
         <p:xfrm>
           <a:off x="457200" y="1280160"/>
-          <a:ext cx="7315200" cy="5029200"/>
+          <a:ext cx="6400800" cy="5029200"/>
         </p:xfrm>
         <a:graphic>
           <a:graphicData uri="http://schemas.openxmlformats.org/drawingml/2006/table">
@@ -3280,12 +3280,12 @@
                 <a:tableStyleId>{5C22544A-7EE6-4342-B048-85BDC9FD1C3A}</a:tableStyleId>
               </a:tblPr>
               <a:tblGrid>
-                <a:gridCol w="1828800"/>
-                <a:gridCol w="1828800"/>
-                <a:gridCol w="1828800"/>
-                <a:gridCol w="1828800"/>
+                <a:gridCol w="1600200"/>
+                <a:gridCol w="1600200"/>
+                <a:gridCol w="1600200"/>
+                <a:gridCol w="1600200"/>
               </a:tblGrid>
-              <a:tr h="718457">
+              <a:tr h="628650">
                 <a:tc>
                   <a:txBody>
                     <a:bodyPr/>
@@ -3379,7 +3379,7 @@
                   </a:tcPr>
                 </a:tc>
               </a:tr>
-              <a:tr h="718457">
+              <a:tr h="628650">
                 <a:tc>
                   <a:txBody>
                     <a:bodyPr/>
@@ -3441,7 +3441,7 @@
                   <a:tcPr/>
                 </a:tc>
               </a:tr>
-              <a:tr h="718457">
+              <a:tr h="628650">
                 <a:tc>
                   <a:txBody>
                     <a:bodyPr/>
@@ -3503,7 +3503,7 @@
                   <a:tcPr/>
                 </a:tc>
               </a:tr>
-              <a:tr h="718457">
+              <a:tr h="628650">
                 <a:tc>
                   <a:txBody>
                     <a:bodyPr/>
@@ -3565,7 +3565,7 @@
                   <a:tcPr/>
                 </a:tc>
               </a:tr>
-              <a:tr h="718457">
+              <a:tr h="628650">
                 <a:tc>
                   <a:txBody>
                     <a:bodyPr/>
@@ -3631,7 +3631,7 @@
                   <a:tcPr/>
                 </a:tc>
               </a:tr>
-              <a:tr h="718457">
+              <a:tr h="628650">
                 <a:tc>
                   <a:txBody>
                     <a:bodyPr/>
@@ -3693,7 +3693,7 @@
                   <a:tcPr/>
                 </a:tc>
               </a:tr>
-              <a:tr h="718458">
+              <a:tr h="628650">
                 <a:tc>
                   <a:txBody>
                     <a:bodyPr/>
@@ -3749,6 +3749,68 @@
                       </a:pPr>
                       <a:r>
                         <a:t>Amber (-18.2 Days)</a:t>
+                      </a:r>
+                    </a:p>
+                  </a:txBody>
+                  <a:tcPr/>
+                </a:tc>
+              </a:tr>
+              <a:tr h="628650">
+                <a:tc>
+                  <a:txBody>
+                    <a:bodyPr/>
+                    <a:lstStyle/>
+                    <a:p>
+                      <a:pPr>
+                        <a:defRPr sz="1000"/>
+                      </a:pPr>
+                      <a:r>
+                        <a:t>CR</a:t>
+                      </a:r>
+                    </a:p>
+                  </a:txBody>
+                  <a:tcPr/>
+                </a:tc>
+                <a:tc>
+                  <a:txBody>
+                    <a:bodyPr/>
+                    <a:lstStyle/>
+                    <a:p>
+                      <a:pPr>
+                        <a:defRPr sz="1000"/>
+                      </a:pPr>
+                      <a:r>
+                        <a:t>Critical Ratio (CPI * SPI)</a:t>
+                      </a:r>
+                    </a:p>
+                  </a:txBody>
+                  <a:tcPr/>
+                </a:tc>
+                <a:tc>
+                  <a:txBody>
+                    <a:bodyPr/>
+                    <a:lstStyle/>
+                    <a:p>
+                      <a:pPr>
+                        <a:defRPr sz="1000"/>
+                      </a:pPr>
+                      <a:r>
+                        <a:t>0.6402</a:t>
+                      </a:r>
+                    </a:p>
+                  </a:txBody>
+                  <a:tcPr/>
+                </a:tc>
+                <a:tc>
+                  <a:txBody>
+                    <a:bodyPr/>
+                    <a:lstStyle/>
+                    <a:p>
+                      <a:pPr>
+                        <a:defRPr sz="1000"/>
+                      </a:pPr>
+                      <a:r>
+                        <a:t>Red (&lt; 0.90 Deficit)</a:t>
                       </a:r>
                     </a:p>
                   </a:txBody>
